--- a/assets/figures-editable/appendix-studies/a-e19.pptx
+++ b/assets/figures-editable/appendix-studies/a-e19.pptx
@@ -7,7 +7,7 @@
   <p:sldIdLst>
     <p:sldId id="256" r:id="rId7"/>
   </p:sldIdLst>
-  <p:sldSz cx="8961120" cy="5449824" type="screen4x3"/>
+  <p:sldSz cx="12191695" cy="6858000" type="screen4x3"/>
   <p:notesSz cx="6858000" cy="9144000"/>
   <p:defaultTextStyle>
     <a:defPPr>
@@ -3098,14 +3098,14 @@
       <p:grpSpPr/>
       <p:sp>
         <p:nvSpPr>
-          <p:cNvPr id="2" name="text 0" descr="sci-ppt:obj-000"/>
+          <p:cNvPr id="2" name="A-E19 text 0" descr="sci-ppt:o000"/>
           <p:cNvSpPr txBox="1"/>
           <p:nvPr/>
         </p:nvSpPr>
         <p:spPr>
           <a:xfrm>
-            <a:off x="256032" y="137160"/>
-            <a:ext cx="7315200" cy="310896"/>
+            <a:off x="274320" y="118872"/>
+            <a:ext cx="11612880" cy="340105"/>
           </a:xfrm>
           <a:prstGeom prst="rect">
             <a:avLst/>
@@ -3114,7 +3114,7 @@
           <a:effectLst/>
         </p:spPr>
         <p:txBody>
-          <a:bodyPr wrap="none" lIns="0" rIns="0" tIns="0" bIns="0" anchor="ctr">
+          <a:bodyPr wrap="none" lIns="18288" rIns="18288" tIns="18288" bIns="18288" anchor="t">
             <a:spAutoFit/>
           </a:bodyPr>
           <a:lstStyle/>
@@ -3125,27 +3125,115 @@
               </a:spcAft>
             </a:pPr>
             <a:r>
-              <a:rPr sz="1439" b="0" i="0">
+              <a:rPr sz="1900" b="1" i="0">
                 <a:solidFill>
                   <a:srgbClr val="8EDBD4"/>
                 </a:solidFill>
                 <a:latin typeface="Arial"/>
               </a:rPr>
-              <a:t>A-E19 · Physical variable map</a:t>
-            </a:r>
-          </a:p>
-        </p:txBody>
-      </p:sp>
-      <p:sp>
-        <p:nvSpPr>
-          <p:cNvPr id="3" name="text 1" descr="sci-ppt:obj-001"/>
+              <a:t>A-E19 · Separate compressibility diagnostic</a:t>
+            </a:r>
+          </a:p>
+        </p:txBody>
+      </p:sp>
+      <p:cxnSp>
+        <p:nvCxnSpPr>
+          <p:cNvPr id="3" name="A-E19 line 1" descr="sci-ppt:o001"/>
+          <p:cNvCxnSpPr/>
+          <p:nvPr/>
+        </p:nvCxnSpPr>
+        <p:spPr>
+          <a:xfrm>
+            <a:off x="914400" y="5029200"/>
+            <a:ext cx="5852160" cy="0"/>
+          </a:xfrm>
+          <a:prstGeom prst="line">
+            <a:avLst/>
+          </a:prstGeom>
+          <a:ln w="19050">
+            <a:solidFill>
+              <a:srgbClr val="B4C7D2"/>
+            </a:solidFill>
+          </a:ln>
+          <a:effectLst/>
+        </p:spPr>
+      </p:cxnSp>
+      <p:cxnSp>
+        <p:nvCxnSpPr>
+          <p:cNvPr id="4" name="A-E19 line 2" descr="sci-ppt:o002"/>
+          <p:cNvCxnSpPr/>
+          <p:nvPr/>
+        </p:nvCxnSpPr>
+        <p:spPr>
+          <a:xfrm>
+            <a:off x="914400" y="1371600"/>
+            <a:ext cx="0" cy="3657600"/>
+          </a:xfrm>
+          <a:prstGeom prst="line">
+            <a:avLst/>
+          </a:prstGeom>
+          <a:ln w="19050">
+            <a:solidFill>
+              <a:srgbClr val="B4C7D2"/>
+            </a:solidFill>
+          </a:ln>
+          <a:effectLst/>
+        </p:spPr>
+      </p:cxnSp>
+      <p:cxnSp>
+        <p:nvCxnSpPr>
+          <p:cNvPr id="5" name="A-E19 line 3" descr="sci-ppt:o003"/>
+          <p:cNvCxnSpPr/>
+          <p:nvPr/>
+        </p:nvCxnSpPr>
+        <p:spPr>
+          <a:xfrm>
+            <a:off x="914400" y="5029200"/>
+            <a:ext cx="0" cy="64008"/>
+          </a:xfrm>
+          <a:prstGeom prst="line">
+            <a:avLst/>
+          </a:prstGeom>
+          <a:ln w="12700">
+            <a:solidFill>
+              <a:srgbClr val="B4C7D2"/>
+            </a:solidFill>
+          </a:ln>
+          <a:effectLst/>
+        </p:spPr>
+      </p:cxnSp>
+      <p:cxnSp>
+        <p:nvCxnSpPr>
+          <p:cNvPr id="6" name="A-E19 line 4" descr="sci-ppt:o004"/>
+          <p:cNvCxnSpPr/>
+          <p:nvPr/>
+        </p:nvCxnSpPr>
+        <p:spPr>
+          <a:xfrm>
+            <a:off x="914400" y="1371600"/>
+            <a:ext cx="0" cy="3657600"/>
+          </a:xfrm>
+          <a:prstGeom prst="line">
+            <a:avLst/>
+          </a:prstGeom>
+          <a:ln w="7620">
+            <a:solidFill>
+              <a:srgbClr val="2E4756"/>
+            </a:solidFill>
+          </a:ln>
+          <a:effectLst/>
+        </p:spPr>
+      </p:cxnSp>
+      <p:sp>
+        <p:nvSpPr>
+          <p:cNvPr id="7" name="A-E19 text 5" descr="sci-ppt:o005"/>
           <p:cNvSpPr txBox="1"/>
           <p:nvPr/>
         </p:nvSpPr>
         <p:spPr>
           <a:xfrm>
-            <a:off x="905256" y="612648"/>
-            <a:ext cx="7498079" cy="310896"/>
+            <a:off x="457200" y="5111496"/>
+            <a:ext cx="914400" cy="208407"/>
           </a:xfrm>
           <a:prstGeom prst="rect">
             <a:avLst/>
@@ -3154,7 +3242,865 @@
           <a:effectLst/>
         </p:spPr>
         <p:txBody>
-          <a:bodyPr wrap="none" lIns="0" rIns="0" tIns="0" bIns="0" anchor="ctr">
+          <a:bodyPr wrap="none" lIns="18288" rIns="18288" tIns="18288" bIns="18288" anchor="t">
+            <a:spAutoFit/>
+          </a:bodyPr>
+          <a:lstStyle/>
+          <a:p>
+            <a:pPr algn="ctr">
+              <a:spcAft>
+                <a:spcPts val="0"/>
+              </a:spcAft>
+            </a:pPr>
+            <a:r>
+              <a:rPr sz="1050" b="0" i="0">
+                <a:solidFill>
+                  <a:srgbClr val="B4C7D2"/>
+                </a:solidFill>
+                <a:latin typeface="Arial"/>
+              </a:rPr>
+              <a:t>1e+05</a:t>
+            </a:r>
+          </a:p>
+        </p:txBody>
+      </p:sp>
+      <p:cxnSp>
+        <p:nvCxnSpPr>
+          <p:cNvPr id="8" name="A-E19 line 6" descr="sci-ppt:o006"/>
+          <p:cNvCxnSpPr/>
+          <p:nvPr/>
+        </p:nvCxnSpPr>
+        <p:spPr>
+          <a:xfrm>
+            <a:off x="2084832" y="5029200"/>
+            <a:ext cx="0" cy="64008"/>
+          </a:xfrm>
+          <a:prstGeom prst="line">
+            <a:avLst/>
+          </a:prstGeom>
+          <a:ln w="12700">
+            <a:solidFill>
+              <a:srgbClr val="B4C7D2"/>
+            </a:solidFill>
+          </a:ln>
+          <a:effectLst/>
+        </p:spPr>
+      </p:cxnSp>
+      <p:cxnSp>
+        <p:nvCxnSpPr>
+          <p:cNvPr id="9" name="A-E19 line 7" descr="sci-ppt:o007"/>
+          <p:cNvCxnSpPr/>
+          <p:nvPr/>
+        </p:nvCxnSpPr>
+        <p:spPr>
+          <a:xfrm>
+            <a:off x="2084832" y="1371600"/>
+            <a:ext cx="0" cy="3657600"/>
+          </a:xfrm>
+          <a:prstGeom prst="line">
+            <a:avLst/>
+          </a:prstGeom>
+          <a:ln w="7620">
+            <a:solidFill>
+              <a:srgbClr val="2E4756"/>
+            </a:solidFill>
+          </a:ln>
+          <a:effectLst/>
+        </p:spPr>
+      </p:cxnSp>
+      <p:sp>
+        <p:nvSpPr>
+          <p:cNvPr id="10" name="A-E19 text 8" descr="sci-ppt:o008"/>
+          <p:cNvSpPr txBox="1"/>
+          <p:nvPr/>
+        </p:nvSpPr>
+        <p:spPr>
+          <a:xfrm>
+            <a:off x="1627632" y="5111496"/>
+            <a:ext cx="914400" cy="208407"/>
+          </a:xfrm>
+          <a:prstGeom prst="rect">
+            <a:avLst/>
+          </a:prstGeom>
+          <a:noFill/>
+          <a:effectLst/>
+        </p:spPr>
+        <p:txBody>
+          <a:bodyPr wrap="none" lIns="18288" rIns="18288" tIns="18288" bIns="18288" anchor="t">
+            <a:spAutoFit/>
+          </a:bodyPr>
+          <a:lstStyle/>
+          <a:p>
+            <a:pPr algn="ctr">
+              <a:spcAft>
+                <a:spcPts val="0"/>
+              </a:spcAft>
+            </a:pPr>
+            <a:r>
+              <a:rPr sz="1050" b="0" i="0">
+                <a:solidFill>
+                  <a:srgbClr val="B4C7D2"/>
+                </a:solidFill>
+                <a:latin typeface="Arial"/>
+              </a:rPr>
+              <a:t>1e+06</a:t>
+            </a:r>
+          </a:p>
+        </p:txBody>
+      </p:sp>
+      <p:cxnSp>
+        <p:nvCxnSpPr>
+          <p:cNvPr id="11" name="A-E19 line 9" descr="sci-ppt:o009"/>
+          <p:cNvCxnSpPr/>
+          <p:nvPr/>
+        </p:nvCxnSpPr>
+        <p:spPr>
+          <a:xfrm>
+            <a:off x="3255264" y="5029200"/>
+            <a:ext cx="0" cy="64008"/>
+          </a:xfrm>
+          <a:prstGeom prst="line">
+            <a:avLst/>
+          </a:prstGeom>
+          <a:ln w="12700">
+            <a:solidFill>
+              <a:srgbClr val="B4C7D2"/>
+            </a:solidFill>
+          </a:ln>
+          <a:effectLst/>
+        </p:spPr>
+      </p:cxnSp>
+      <p:cxnSp>
+        <p:nvCxnSpPr>
+          <p:cNvPr id="12" name="A-E19 line 10" descr="sci-ppt:o010"/>
+          <p:cNvCxnSpPr/>
+          <p:nvPr/>
+        </p:nvCxnSpPr>
+        <p:spPr>
+          <a:xfrm>
+            <a:off x="3255264" y="1371600"/>
+            <a:ext cx="0" cy="3657600"/>
+          </a:xfrm>
+          <a:prstGeom prst="line">
+            <a:avLst/>
+          </a:prstGeom>
+          <a:ln w="7620">
+            <a:solidFill>
+              <a:srgbClr val="2E4756"/>
+            </a:solidFill>
+          </a:ln>
+          <a:effectLst/>
+        </p:spPr>
+      </p:cxnSp>
+      <p:sp>
+        <p:nvSpPr>
+          <p:cNvPr id="13" name="A-E19 text 11" descr="sci-ppt:o011"/>
+          <p:cNvSpPr txBox="1"/>
+          <p:nvPr/>
+        </p:nvSpPr>
+        <p:spPr>
+          <a:xfrm>
+            <a:off x="2798064" y="5111496"/>
+            <a:ext cx="914400" cy="208407"/>
+          </a:xfrm>
+          <a:prstGeom prst="rect">
+            <a:avLst/>
+          </a:prstGeom>
+          <a:noFill/>
+          <a:effectLst/>
+        </p:spPr>
+        <p:txBody>
+          <a:bodyPr wrap="none" lIns="18288" rIns="18288" tIns="18288" bIns="18288" anchor="t">
+            <a:spAutoFit/>
+          </a:bodyPr>
+          <a:lstStyle/>
+          <a:p>
+            <a:pPr algn="ctr">
+              <a:spcAft>
+                <a:spcPts val="0"/>
+              </a:spcAft>
+            </a:pPr>
+            <a:r>
+              <a:rPr sz="1050" b="0" i="0">
+                <a:solidFill>
+                  <a:srgbClr val="B4C7D2"/>
+                </a:solidFill>
+                <a:latin typeface="Arial"/>
+              </a:rPr>
+              <a:t>1e+07</a:t>
+            </a:r>
+          </a:p>
+        </p:txBody>
+      </p:sp>
+      <p:cxnSp>
+        <p:nvCxnSpPr>
+          <p:cNvPr id="14" name="A-E19 line 12" descr="sci-ppt:o012"/>
+          <p:cNvCxnSpPr/>
+          <p:nvPr/>
+        </p:nvCxnSpPr>
+        <p:spPr>
+          <a:xfrm>
+            <a:off x="4425696" y="5029200"/>
+            <a:ext cx="0" cy="64008"/>
+          </a:xfrm>
+          <a:prstGeom prst="line">
+            <a:avLst/>
+          </a:prstGeom>
+          <a:ln w="12700">
+            <a:solidFill>
+              <a:srgbClr val="B4C7D2"/>
+            </a:solidFill>
+          </a:ln>
+          <a:effectLst/>
+        </p:spPr>
+      </p:cxnSp>
+      <p:cxnSp>
+        <p:nvCxnSpPr>
+          <p:cNvPr id="15" name="A-E19 line 13" descr="sci-ppt:o013"/>
+          <p:cNvCxnSpPr/>
+          <p:nvPr/>
+        </p:nvCxnSpPr>
+        <p:spPr>
+          <a:xfrm>
+            <a:off x="4425696" y="1371600"/>
+            <a:ext cx="0" cy="3657600"/>
+          </a:xfrm>
+          <a:prstGeom prst="line">
+            <a:avLst/>
+          </a:prstGeom>
+          <a:ln w="7620">
+            <a:solidFill>
+              <a:srgbClr val="2E4756"/>
+            </a:solidFill>
+          </a:ln>
+          <a:effectLst/>
+        </p:spPr>
+      </p:cxnSp>
+      <p:sp>
+        <p:nvSpPr>
+          <p:cNvPr id="16" name="A-E19 text 14" descr="sci-ppt:o014"/>
+          <p:cNvSpPr txBox="1"/>
+          <p:nvPr/>
+        </p:nvSpPr>
+        <p:spPr>
+          <a:xfrm>
+            <a:off x="3968496" y="5111496"/>
+            <a:ext cx="914400" cy="208407"/>
+          </a:xfrm>
+          <a:prstGeom prst="rect">
+            <a:avLst/>
+          </a:prstGeom>
+          <a:noFill/>
+          <a:effectLst/>
+        </p:spPr>
+        <p:txBody>
+          <a:bodyPr wrap="none" lIns="18288" rIns="18288" tIns="18288" bIns="18288" anchor="t">
+            <a:spAutoFit/>
+          </a:bodyPr>
+          <a:lstStyle/>
+          <a:p>
+            <a:pPr algn="ctr">
+              <a:spcAft>
+                <a:spcPts val="0"/>
+              </a:spcAft>
+            </a:pPr>
+            <a:r>
+              <a:rPr sz="1050" b="0" i="0">
+                <a:solidFill>
+                  <a:srgbClr val="B4C7D2"/>
+                </a:solidFill>
+                <a:latin typeface="Arial"/>
+              </a:rPr>
+              <a:t>1e+08</a:t>
+            </a:r>
+          </a:p>
+        </p:txBody>
+      </p:sp>
+      <p:cxnSp>
+        <p:nvCxnSpPr>
+          <p:cNvPr id="17" name="A-E19 line 15" descr="sci-ppt:o015"/>
+          <p:cNvCxnSpPr/>
+          <p:nvPr/>
+        </p:nvCxnSpPr>
+        <p:spPr>
+          <a:xfrm>
+            <a:off x="5596128" y="5029200"/>
+            <a:ext cx="0" cy="64008"/>
+          </a:xfrm>
+          <a:prstGeom prst="line">
+            <a:avLst/>
+          </a:prstGeom>
+          <a:ln w="12700">
+            <a:solidFill>
+              <a:srgbClr val="B4C7D2"/>
+            </a:solidFill>
+          </a:ln>
+          <a:effectLst/>
+        </p:spPr>
+      </p:cxnSp>
+      <p:cxnSp>
+        <p:nvCxnSpPr>
+          <p:cNvPr id="18" name="A-E19 line 16" descr="sci-ppt:o016"/>
+          <p:cNvCxnSpPr/>
+          <p:nvPr/>
+        </p:nvCxnSpPr>
+        <p:spPr>
+          <a:xfrm>
+            <a:off x="5596128" y="1371600"/>
+            <a:ext cx="0" cy="3657600"/>
+          </a:xfrm>
+          <a:prstGeom prst="line">
+            <a:avLst/>
+          </a:prstGeom>
+          <a:ln w="7620">
+            <a:solidFill>
+              <a:srgbClr val="2E4756"/>
+            </a:solidFill>
+          </a:ln>
+          <a:effectLst/>
+        </p:spPr>
+      </p:cxnSp>
+      <p:sp>
+        <p:nvSpPr>
+          <p:cNvPr id="19" name="A-E19 text 17" descr="sci-ppt:o017"/>
+          <p:cNvSpPr txBox="1"/>
+          <p:nvPr/>
+        </p:nvSpPr>
+        <p:spPr>
+          <a:xfrm>
+            <a:off x="5138928" y="5111496"/>
+            <a:ext cx="914400" cy="208407"/>
+          </a:xfrm>
+          <a:prstGeom prst="rect">
+            <a:avLst/>
+          </a:prstGeom>
+          <a:noFill/>
+          <a:effectLst/>
+        </p:spPr>
+        <p:txBody>
+          <a:bodyPr wrap="none" lIns="18288" rIns="18288" tIns="18288" bIns="18288" anchor="t">
+            <a:spAutoFit/>
+          </a:bodyPr>
+          <a:lstStyle/>
+          <a:p>
+            <a:pPr algn="ctr">
+              <a:spcAft>
+                <a:spcPts val="0"/>
+              </a:spcAft>
+            </a:pPr>
+            <a:r>
+              <a:rPr sz="1050" b="0" i="0">
+                <a:solidFill>
+                  <a:srgbClr val="B4C7D2"/>
+                </a:solidFill>
+                <a:latin typeface="Arial"/>
+              </a:rPr>
+              <a:t>1e+09</a:t>
+            </a:r>
+          </a:p>
+        </p:txBody>
+      </p:sp>
+      <p:cxnSp>
+        <p:nvCxnSpPr>
+          <p:cNvPr id="20" name="A-E19 line 18" descr="sci-ppt:o018"/>
+          <p:cNvCxnSpPr/>
+          <p:nvPr/>
+        </p:nvCxnSpPr>
+        <p:spPr>
+          <a:xfrm>
+            <a:off x="6766560" y="5029200"/>
+            <a:ext cx="0" cy="64008"/>
+          </a:xfrm>
+          <a:prstGeom prst="line">
+            <a:avLst/>
+          </a:prstGeom>
+          <a:ln w="12700">
+            <a:solidFill>
+              <a:srgbClr val="B4C7D2"/>
+            </a:solidFill>
+          </a:ln>
+          <a:effectLst/>
+        </p:spPr>
+      </p:cxnSp>
+      <p:cxnSp>
+        <p:nvCxnSpPr>
+          <p:cNvPr id="21" name="A-E19 line 19" descr="sci-ppt:o019"/>
+          <p:cNvCxnSpPr/>
+          <p:nvPr/>
+        </p:nvCxnSpPr>
+        <p:spPr>
+          <a:xfrm>
+            <a:off x="6766560" y="1371600"/>
+            <a:ext cx="0" cy="3657600"/>
+          </a:xfrm>
+          <a:prstGeom prst="line">
+            <a:avLst/>
+          </a:prstGeom>
+          <a:ln w="7620">
+            <a:solidFill>
+              <a:srgbClr val="2E4756"/>
+            </a:solidFill>
+          </a:ln>
+          <a:effectLst/>
+        </p:spPr>
+      </p:cxnSp>
+      <p:sp>
+        <p:nvSpPr>
+          <p:cNvPr id="22" name="A-E19 text 20" descr="sci-ppt:o020"/>
+          <p:cNvSpPr txBox="1"/>
+          <p:nvPr/>
+        </p:nvSpPr>
+        <p:spPr>
+          <a:xfrm>
+            <a:off x="6309360" y="5111496"/>
+            <a:ext cx="914400" cy="208407"/>
+          </a:xfrm>
+          <a:prstGeom prst="rect">
+            <a:avLst/>
+          </a:prstGeom>
+          <a:noFill/>
+          <a:effectLst/>
+        </p:spPr>
+        <p:txBody>
+          <a:bodyPr wrap="none" lIns="18288" rIns="18288" tIns="18288" bIns="18288" anchor="t">
+            <a:spAutoFit/>
+          </a:bodyPr>
+          <a:lstStyle/>
+          <a:p>
+            <a:pPr algn="ctr">
+              <a:spcAft>
+                <a:spcPts val="0"/>
+              </a:spcAft>
+            </a:pPr>
+            <a:r>
+              <a:rPr sz="1050" b="0" i="0">
+                <a:solidFill>
+                  <a:srgbClr val="B4C7D2"/>
+                </a:solidFill>
+                <a:latin typeface="Arial"/>
+              </a:rPr>
+              <a:t>1e+10</a:t>
+            </a:r>
+          </a:p>
+        </p:txBody>
+      </p:sp>
+      <p:cxnSp>
+        <p:nvCxnSpPr>
+          <p:cNvPr id="23" name="A-E19 line 21" descr="sci-ppt:o021"/>
+          <p:cNvCxnSpPr/>
+          <p:nvPr/>
+        </p:nvCxnSpPr>
+        <p:spPr>
+          <a:xfrm>
+            <a:off x="850392" y="5029200"/>
+            <a:ext cx="64008" cy="0"/>
+          </a:xfrm>
+          <a:prstGeom prst="line">
+            <a:avLst/>
+          </a:prstGeom>
+          <a:ln w="12700">
+            <a:solidFill>
+              <a:srgbClr val="B4C7D2"/>
+            </a:solidFill>
+          </a:ln>
+          <a:effectLst/>
+        </p:spPr>
+      </p:cxnSp>
+      <p:cxnSp>
+        <p:nvCxnSpPr>
+          <p:cNvPr id="24" name="A-E19 line 22" descr="sci-ppt:o022"/>
+          <p:cNvCxnSpPr/>
+          <p:nvPr/>
+        </p:nvCxnSpPr>
+        <p:spPr>
+          <a:xfrm>
+            <a:off x="850392" y="4114800"/>
+            <a:ext cx="64008" cy="0"/>
+          </a:xfrm>
+          <a:prstGeom prst="line">
+            <a:avLst/>
+          </a:prstGeom>
+          <a:ln w="12700">
+            <a:solidFill>
+              <a:srgbClr val="B4C7D2"/>
+            </a:solidFill>
+          </a:ln>
+          <a:effectLst/>
+        </p:spPr>
+      </p:cxnSp>
+      <p:cxnSp>
+        <p:nvCxnSpPr>
+          <p:cNvPr id="25" name="A-E19 line 23" descr="sci-ppt:o023"/>
+          <p:cNvCxnSpPr/>
+          <p:nvPr/>
+        </p:nvCxnSpPr>
+        <p:spPr>
+          <a:xfrm>
+            <a:off x="914400" y="4114800"/>
+            <a:ext cx="5852160" cy="0"/>
+          </a:xfrm>
+          <a:prstGeom prst="line">
+            <a:avLst/>
+          </a:prstGeom>
+          <a:ln w="7620">
+            <a:solidFill>
+              <a:srgbClr val="2E4756"/>
+            </a:solidFill>
+          </a:ln>
+          <a:effectLst/>
+        </p:spPr>
+      </p:cxnSp>
+      <p:sp>
+        <p:nvSpPr>
+          <p:cNvPr id="26" name="A-E19 text 24" descr="sci-ppt:o024"/>
+          <p:cNvSpPr txBox="1"/>
+          <p:nvPr/>
+        </p:nvSpPr>
+        <p:spPr>
+          <a:xfrm>
+            <a:off x="45720" y="4032504"/>
+            <a:ext cx="777240" cy="208407"/>
+          </a:xfrm>
+          <a:prstGeom prst="rect">
+            <a:avLst/>
+          </a:prstGeom>
+          <a:noFill/>
+          <a:effectLst/>
+        </p:spPr>
+        <p:txBody>
+          <a:bodyPr wrap="none" lIns="18288" rIns="18288" tIns="18288" bIns="18288" anchor="t">
+            <a:spAutoFit/>
+          </a:bodyPr>
+          <a:lstStyle/>
+          <a:p>
+            <a:pPr algn="r">
+              <a:spcAft>
+                <a:spcPts val="0"/>
+              </a:spcAft>
+            </a:pPr>
+            <a:r>
+              <a:rPr sz="1050" b="0" i="0">
+                <a:solidFill>
+                  <a:srgbClr val="B4C7D2"/>
+                </a:solidFill>
+                <a:latin typeface="Arial"/>
+              </a:rPr>
+              <a:t>10</a:t>
+            </a:r>
+          </a:p>
+        </p:txBody>
+      </p:sp>
+      <p:cxnSp>
+        <p:nvCxnSpPr>
+          <p:cNvPr id="27" name="A-E19 line 25" descr="sci-ppt:o025"/>
+          <p:cNvCxnSpPr/>
+          <p:nvPr/>
+        </p:nvCxnSpPr>
+        <p:spPr>
+          <a:xfrm>
+            <a:off x="850392" y="3200400"/>
+            <a:ext cx="64008" cy="0"/>
+          </a:xfrm>
+          <a:prstGeom prst="line">
+            <a:avLst/>
+          </a:prstGeom>
+          <a:ln w="12700">
+            <a:solidFill>
+              <a:srgbClr val="B4C7D2"/>
+            </a:solidFill>
+          </a:ln>
+          <a:effectLst/>
+        </p:spPr>
+      </p:cxnSp>
+      <p:cxnSp>
+        <p:nvCxnSpPr>
+          <p:cNvPr id="28" name="A-E19 line 26" descr="sci-ppt:o026"/>
+          <p:cNvCxnSpPr/>
+          <p:nvPr/>
+        </p:nvCxnSpPr>
+        <p:spPr>
+          <a:xfrm>
+            <a:off x="914400" y="3200400"/>
+            <a:ext cx="5852160" cy="0"/>
+          </a:xfrm>
+          <a:prstGeom prst="line">
+            <a:avLst/>
+          </a:prstGeom>
+          <a:ln w="7620">
+            <a:solidFill>
+              <a:srgbClr val="2E4756"/>
+            </a:solidFill>
+          </a:ln>
+          <a:effectLst/>
+        </p:spPr>
+      </p:cxnSp>
+      <p:sp>
+        <p:nvSpPr>
+          <p:cNvPr id="29" name="A-E19 text 27" descr="sci-ppt:o027"/>
+          <p:cNvSpPr txBox="1"/>
+          <p:nvPr/>
+        </p:nvSpPr>
+        <p:spPr>
+          <a:xfrm>
+            <a:off x="45720" y="3118104"/>
+            <a:ext cx="777240" cy="208407"/>
+          </a:xfrm>
+          <a:prstGeom prst="rect">
+            <a:avLst/>
+          </a:prstGeom>
+          <a:noFill/>
+          <a:effectLst/>
+        </p:spPr>
+        <p:txBody>
+          <a:bodyPr wrap="none" lIns="18288" rIns="18288" tIns="18288" bIns="18288" anchor="t">
+            <a:spAutoFit/>
+          </a:bodyPr>
+          <a:lstStyle/>
+          <a:p>
+            <a:pPr algn="r">
+              <a:spcAft>
+                <a:spcPts val="0"/>
+              </a:spcAft>
+            </a:pPr>
+            <a:r>
+              <a:rPr sz="1050" b="0" i="0">
+                <a:solidFill>
+                  <a:srgbClr val="B4C7D2"/>
+                </a:solidFill>
+                <a:latin typeface="Arial"/>
+              </a:rPr>
+              <a:t>100</a:t>
+            </a:r>
+          </a:p>
+        </p:txBody>
+      </p:sp>
+      <p:cxnSp>
+        <p:nvCxnSpPr>
+          <p:cNvPr id="30" name="A-E19 line 28" descr="sci-ppt:o028"/>
+          <p:cNvCxnSpPr/>
+          <p:nvPr/>
+        </p:nvCxnSpPr>
+        <p:spPr>
+          <a:xfrm>
+            <a:off x="850392" y="2286000"/>
+            <a:ext cx="64008" cy="0"/>
+          </a:xfrm>
+          <a:prstGeom prst="line">
+            <a:avLst/>
+          </a:prstGeom>
+          <a:ln w="12700">
+            <a:solidFill>
+              <a:srgbClr val="B4C7D2"/>
+            </a:solidFill>
+          </a:ln>
+          <a:effectLst/>
+        </p:spPr>
+      </p:cxnSp>
+      <p:cxnSp>
+        <p:nvCxnSpPr>
+          <p:cNvPr id="31" name="A-E19 line 29" descr="sci-ppt:o029"/>
+          <p:cNvCxnSpPr/>
+          <p:nvPr/>
+        </p:nvCxnSpPr>
+        <p:spPr>
+          <a:xfrm>
+            <a:off x="914400" y="2286000"/>
+            <a:ext cx="5852160" cy="0"/>
+          </a:xfrm>
+          <a:prstGeom prst="line">
+            <a:avLst/>
+          </a:prstGeom>
+          <a:ln w="7620">
+            <a:solidFill>
+              <a:srgbClr val="2E4756"/>
+            </a:solidFill>
+          </a:ln>
+          <a:effectLst/>
+        </p:spPr>
+      </p:cxnSp>
+      <p:sp>
+        <p:nvSpPr>
+          <p:cNvPr id="32" name="A-E19 text 30" descr="sci-ppt:o030"/>
+          <p:cNvSpPr txBox="1"/>
+          <p:nvPr/>
+        </p:nvSpPr>
+        <p:spPr>
+          <a:xfrm>
+            <a:off x="45720" y="2203704"/>
+            <a:ext cx="777240" cy="208407"/>
+          </a:xfrm>
+          <a:prstGeom prst="rect">
+            <a:avLst/>
+          </a:prstGeom>
+          <a:noFill/>
+          <a:effectLst/>
+        </p:spPr>
+        <p:txBody>
+          <a:bodyPr wrap="none" lIns="18288" rIns="18288" tIns="18288" bIns="18288" anchor="t">
+            <a:spAutoFit/>
+          </a:bodyPr>
+          <a:lstStyle/>
+          <a:p>
+            <a:pPr algn="r">
+              <a:spcAft>
+                <a:spcPts val="0"/>
+              </a:spcAft>
+            </a:pPr>
+            <a:r>
+              <a:rPr sz="1050" b="0" i="0">
+                <a:solidFill>
+                  <a:srgbClr val="B4C7D2"/>
+                </a:solidFill>
+                <a:latin typeface="Arial"/>
+              </a:rPr>
+              <a:t>1000</a:t>
+            </a:r>
+          </a:p>
+        </p:txBody>
+      </p:sp>
+      <p:cxnSp>
+        <p:nvCxnSpPr>
+          <p:cNvPr id="33" name="A-E19 line 31" descr="sci-ppt:o031"/>
+          <p:cNvCxnSpPr/>
+          <p:nvPr/>
+        </p:nvCxnSpPr>
+        <p:spPr>
+          <a:xfrm>
+            <a:off x="850392" y="1371600"/>
+            <a:ext cx="64008" cy="0"/>
+          </a:xfrm>
+          <a:prstGeom prst="line">
+            <a:avLst/>
+          </a:prstGeom>
+          <a:ln w="12700">
+            <a:solidFill>
+              <a:srgbClr val="B4C7D2"/>
+            </a:solidFill>
+          </a:ln>
+          <a:effectLst/>
+        </p:spPr>
+      </p:cxnSp>
+      <p:cxnSp>
+        <p:nvCxnSpPr>
+          <p:cNvPr id="34" name="A-E19 line 32" descr="sci-ppt:o032"/>
+          <p:cNvCxnSpPr/>
+          <p:nvPr/>
+        </p:nvCxnSpPr>
+        <p:spPr>
+          <a:xfrm>
+            <a:off x="914400" y="1371600"/>
+            <a:ext cx="5852160" cy="0"/>
+          </a:xfrm>
+          <a:prstGeom prst="line">
+            <a:avLst/>
+          </a:prstGeom>
+          <a:ln w="7620">
+            <a:solidFill>
+              <a:srgbClr val="2E4756"/>
+            </a:solidFill>
+          </a:ln>
+          <a:effectLst/>
+        </p:spPr>
+      </p:cxnSp>
+      <p:sp>
+        <p:nvSpPr>
+          <p:cNvPr id="35" name="A-E19 text 33" descr="sci-ppt:o033"/>
+          <p:cNvSpPr txBox="1"/>
+          <p:nvPr/>
+        </p:nvSpPr>
+        <p:spPr>
+          <a:xfrm>
+            <a:off x="45720" y="1289304"/>
+            <a:ext cx="777240" cy="208407"/>
+          </a:xfrm>
+          <a:prstGeom prst="rect">
+            <a:avLst/>
+          </a:prstGeom>
+          <a:noFill/>
+          <a:effectLst/>
+        </p:spPr>
+        <p:txBody>
+          <a:bodyPr wrap="none" lIns="18288" rIns="18288" tIns="18288" bIns="18288" anchor="t">
+            <a:spAutoFit/>
+          </a:bodyPr>
+          <a:lstStyle/>
+          <a:p>
+            <a:pPr algn="r">
+              <a:spcAft>
+                <a:spcPts val="0"/>
+              </a:spcAft>
+            </a:pPr>
+            <a:r>
+              <a:rPr sz="1050" b="0" i="0">
+                <a:solidFill>
+                  <a:srgbClr val="B4C7D2"/>
+                </a:solidFill>
+                <a:latin typeface="Arial"/>
+              </a:rPr>
+              <a:t>10000</a:t>
+            </a:r>
+          </a:p>
+        </p:txBody>
+      </p:sp>
+      <p:sp>
+        <p:nvSpPr>
+          <p:cNvPr id="36" name="A-E19 text 34" descr="sci-ppt:o034"/>
+          <p:cNvSpPr txBox="1"/>
+          <p:nvPr/>
+        </p:nvSpPr>
+        <p:spPr>
+          <a:xfrm>
+            <a:off x="914400" y="5312664"/>
+            <a:ext cx="5852160" cy="231648"/>
+          </a:xfrm>
+          <a:prstGeom prst="rect">
+            <a:avLst/>
+          </a:prstGeom>
+          <a:noFill/>
+          <a:effectLst/>
+        </p:spPr>
+        <p:txBody>
+          <a:bodyPr wrap="none" lIns="18288" rIns="18288" tIns="18288" bIns="18288" anchor="t">
+            <a:spAutoFit/>
+          </a:bodyPr>
+          <a:lstStyle/>
+          <a:p>
+            <a:pPr algn="ctr">
+              <a:spcAft>
+                <a:spcPts val="0"/>
+              </a:spcAft>
+            </a:pPr>
+            <a:r>
+              <a:rPr sz="1200" b="0" i="0">
+                <a:solidFill>
+                  <a:srgbClr val="E7F0F3"/>
+                </a:solidFill>
+                <a:latin typeface="Arial"/>
+              </a:rPr>
+              <a:t>bulk modulus K_bulk  (Pa)</a:t>
+            </a:r>
+          </a:p>
+        </p:txBody>
+      </p:sp>
+      <p:sp>
+        <p:nvSpPr>
+          <p:cNvPr id="37" name="A-E19 text 35" descr="sci-ppt:o035"/>
+          <p:cNvSpPr txBox="1"/>
+          <p:nvPr/>
+        </p:nvSpPr>
+        <p:spPr>
+          <a:xfrm>
+            <a:off x="365760" y="1024128"/>
+            <a:ext cx="5852160" cy="231648"/>
+          </a:xfrm>
+          <a:prstGeom prst="rect">
+            <a:avLst/>
+          </a:prstGeom>
+          <a:noFill/>
+          <a:effectLst/>
+        </p:spPr>
+        <p:txBody>
+          <a:bodyPr wrap="none" lIns="18288" rIns="18288" tIns="18288" bIns="18288" anchor="t">
             <a:spAutoFit/>
           </a:bodyPr>
           <a:lstStyle/>
@@ -3165,37 +4111,810 @@
               </a:spcAft>
             </a:pPr>
             <a:r>
-              <a:rPr sz="1296" b="0" i="0">
+              <a:rPr sz="1200" b="0" i="0">
                 <a:solidFill>
                   <a:srgbClr val="E7F0F3"/>
                 </a:solidFill>
                 <a:latin typeface="Arial"/>
               </a:rPr>
-              <a:t>Response times and dimensionless comparisons</a:t>
-            </a:r>
-          </a:p>
-        </p:txBody>
-      </p:sp>
-      <p:sp>
-        <p:nvSpPr>
-          <p:cNvPr id="4" name="rect 2" descr="sci-ppt:obj-002"/>
+              <a:t>longitudinal speed c_L  (m/s)</a:t>
+            </a:r>
+          </a:p>
+        </p:txBody>
+      </p:sp>
+      <p:sp>
+        <p:nvSpPr>
+          <p:cNvPr id="38" name="A-E19 polygon 36" descr="sci-ppt:o036"/>
           <p:cNvSpPr/>
           <p:nvPr/>
         </p:nvSpPr>
         <p:spPr>
           <a:xfrm>
-            <a:off x="996696" y="1069848"/>
-            <a:ext cx="6766560" cy="347472"/>
+            <a:off x="914400" y="1828799"/>
+            <a:ext cx="5852160" cy="2239063"/>
+          </a:xfrm>
+          <a:custGeom>
+            <a:avLst/>
+            <a:gdLst/>
+            <a:ahLst/>
+            <a:cxnLst/>
+            <a:rect l="l" t="t" r="r" b="b"/>
+            <a:pathLst>
+              <a:path w="5852160" h="2239063">
+                <a:moveTo>
+                  <a:pt x="0" y="2239063"/>
+                </a:moveTo>
+                <a:lnTo>
+                  <a:pt x="29407" y="2229940"/>
+                </a:lnTo>
+                <a:lnTo>
+                  <a:pt x="58815" y="2220709"/>
+                </a:lnTo>
+                <a:lnTo>
+                  <a:pt x="88223" y="2211376"/>
+                </a:lnTo>
+                <a:lnTo>
+                  <a:pt x="117631" y="2201943"/>
+                </a:lnTo>
+                <a:lnTo>
+                  <a:pt x="147039" y="2192414"/>
+                </a:lnTo>
+                <a:lnTo>
+                  <a:pt x="176447" y="2182793"/>
+                </a:lnTo>
+                <a:lnTo>
+                  <a:pt x="205854" y="2173084"/>
+                </a:lnTo>
+                <a:lnTo>
+                  <a:pt x="235262" y="2163289"/>
+                </a:lnTo>
+                <a:lnTo>
+                  <a:pt x="264670" y="2153412"/>
+                </a:lnTo>
+                <a:lnTo>
+                  <a:pt x="294078" y="2143457"/>
+                </a:lnTo>
+                <a:lnTo>
+                  <a:pt x="323486" y="2133427"/>
+                </a:lnTo>
+                <a:lnTo>
+                  <a:pt x="352894" y="2123325"/>
+                </a:lnTo>
+                <a:lnTo>
+                  <a:pt x="382301" y="2113153"/>
+                </a:lnTo>
+                <a:lnTo>
+                  <a:pt x="411709" y="2102916"/>
+                </a:lnTo>
+                <a:lnTo>
+                  <a:pt x="441117" y="2092616"/>
+                </a:lnTo>
+                <a:lnTo>
+                  <a:pt x="470525" y="2082256"/>
+                </a:lnTo>
+                <a:lnTo>
+                  <a:pt x="499933" y="2071838"/>
+                </a:lnTo>
+                <a:lnTo>
+                  <a:pt x="529341" y="2061365"/>
+                </a:lnTo>
+                <a:lnTo>
+                  <a:pt x="558748" y="2050840"/>
+                </a:lnTo>
+                <a:lnTo>
+                  <a:pt x="588156" y="2040266"/>
+                </a:lnTo>
+                <a:lnTo>
+                  <a:pt x="617564" y="2029643"/>
+                </a:lnTo>
+                <a:lnTo>
+                  <a:pt x="646972" y="2018976"/>
+                </a:lnTo>
+                <a:lnTo>
+                  <a:pt x="676380" y="2008266"/>
+                </a:lnTo>
+                <a:lnTo>
+                  <a:pt x="705788" y="1997515"/>
+                </a:lnTo>
+                <a:lnTo>
+                  <a:pt x="735195" y="1986724"/>
+                </a:lnTo>
+                <a:lnTo>
+                  <a:pt x="764603" y="1975897"/>
+                </a:lnTo>
+                <a:lnTo>
+                  <a:pt x="794011" y="1965035"/>
+                </a:lnTo>
+                <a:lnTo>
+                  <a:pt x="823419" y="1954140"/>
+                </a:lnTo>
+                <a:lnTo>
+                  <a:pt x="852827" y="1943213"/>
+                </a:lnTo>
+                <a:lnTo>
+                  <a:pt x="882235" y="1932256"/>
+                </a:lnTo>
+                <a:lnTo>
+                  <a:pt x="911643" y="1921270"/>
+                </a:lnTo>
+                <a:lnTo>
+                  <a:pt x="941050" y="1910257"/>
+                </a:lnTo>
+                <a:lnTo>
+                  <a:pt x="970458" y="1899219"/>
+                </a:lnTo>
+                <a:lnTo>
+                  <a:pt x="999866" y="1888156"/>
+                </a:lnTo>
+                <a:lnTo>
+                  <a:pt x="1029274" y="1877071"/>
+                </a:lnTo>
+                <a:lnTo>
+                  <a:pt x="1058682" y="1865963"/>
+                </a:lnTo>
+                <a:lnTo>
+                  <a:pt x="1088090" y="1854835"/>
+                </a:lnTo>
+                <a:lnTo>
+                  <a:pt x="1117497" y="1843687"/>
+                </a:lnTo>
+                <a:lnTo>
+                  <a:pt x="1146905" y="1832521"/>
+                </a:lnTo>
+                <a:lnTo>
+                  <a:pt x="1176313" y="1821337"/>
+                </a:lnTo>
+                <a:lnTo>
+                  <a:pt x="1205721" y="1810136"/>
+                </a:lnTo>
+                <a:lnTo>
+                  <a:pt x="1235129" y="1798920"/>
+                </a:lnTo>
+                <a:lnTo>
+                  <a:pt x="1264537" y="1787689"/>
+                </a:lnTo>
+                <a:lnTo>
+                  <a:pt x="1293944" y="1776443"/>
+                </a:lnTo>
+                <a:lnTo>
+                  <a:pt x="1323352" y="1765185"/>
+                </a:lnTo>
+                <a:lnTo>
+                  <a:pt x="1352760" y="1753913"/>
+                </a:lnTo>
+                <a:lnTo>
+                  <a:pt x="1382168" y="1742630"/>
+                </a:lnTo>
+                <a:lnTo>
+                  <a:pt x="1411576" y="1731336"/>
+                </a:lnTo>
+                <a:lnTo>
+                  <a:pt x="1440984" y="1720031"/>
+                </a:lnTo>
+                <a:lnTo>
+                  <a:pt x="1470391" y="1708715"/>
+                </a:lnTo>
+                <a:lnTo>
+                  <a:pt x="1499799" y="1697391"/>
+                </a:lnTo>
+                <a:lnTo>
+                  <a:pt x="1529207" y="1686057"/>
+                </a:lnTo>
+                <a:lnTo>
+                  <a:pt x="1558615" y="1674714"/>
+                </a:lnTo>
+                <a:lnTo>
+                  <a:pt x="1588023" y="1663364"/>
+                </a:lnTo>
+                <a:lnTo>
+                  <a:pt x="1617431" y="1652006"/>
+                </a:lnTo>
+                <a:lnTo>
+                  <a:pt x="1646838" y="1640641"/>
+                </a:lnTo>
+                <a:lnTo>
+                  <a:pt x="1676246" y="1629269"/>
+                </a:lnTo>
+                <a:lnTo>
+                  <a:pt x="1705654" y="1617890"/>
+                </a:lnTo>
+                <a:lnTo>
+                  <a:pt x="1735062" y="1606506"/>
+                </a:lnTo>
+                <a:lnTo>
+                  <a:pt x="1764470" y="1595115"/>
+                </a:lnTo>
+                <a:lnTo>
+                  <a:pt x="1793878" y="1583720"/>
+                </a:lnTo>
+                <a:lnTo>
+                  <a:pt x="1823286" y="1572319"/>
+                </a:lnTo>
+                <a:lnTo>
+                  <a:pt x="1852693" y="1560913"/>
+                </a:lnTo>
+                <a:lnTo>
+                  <a:pt x="1882101" y="1549503"/>
+                </a:lnTo>
+                <a:lnTo>
+                  <a:pt x="1911509" y="1538089"/>
+                </a:lnTo>
+                <a:lnTo>
+                  <a:pt x="1940917" y="1526670"/>
+                </a:lnTo>
+                <a:lnTo>
+                  <a:pt x="1970325" y="1515248"/>
+                </a:lnTo>
+                <a:lnTo>
+                  <a:pt x="1999733" y="1503822"/>
+                </a:lnTo>
+                <a:lnTo>
+                  <a:pt x="2029140" y="1492392"/>
+                </a:lnTo>
+                <a:lnTo>
+                  <a:pt x="2058548" y="1480959"/>
+                </a:lnTo>
+                <a:lnTo>
+                  <a:pt x="2087956" y="1469524"/>
+                </a:lnTo>
+                <a:lnTo>
+                  <a:pt x="2117364" y="1458085"/>
+                </a:lnTo>
+                <a:lnTo>
+                  <a:pt x="2146772" y="1446643"/>
+                </a:lnTo>
+                <a:lnTo>
+                  <a:pt x="2176180" y="1435199"/>
+                </a:lnTo>
+                <a:lnTo>
+                  <a:pt x="2205587" y="1423753"/>
+                </a:lnTo>
+                <a:lnTo>
+                  <a:pt x="2234995" y="1412304"/>
+                </a:lnTo>
+                <a:lnTo>
+                  <a:pt x="2264403" y="1400853"/>
+                </a:lnTo>
+                <a:lnTo>
+                  <a:pt x="2293811" y="1389400"/>
+                </a:lnTo>
+                <a:lnTo>
+                  <a:pt x="2323219" y="1377946"/>
+                </a:lnTo>
+                <a:lnTo>
+                  <a:pt x="2352627" y="1366489"/>
+                </a:lnTo>
+                <a:lnTo>
+                  <a:pt x="2382034" y="1355030"/>
+                </a:lnTo>
+                <a:lnTo>
+                  <a:pt x="2411442" y="1343570"/>
+                </a:lnTo>
+                <a:lnTo>
+                  <a:pt x="2440850" y="1332109"/>
+                </a:lnTo>
+                <a:lnTo>
+                  <a:pt x="2470258" y="1320646"/>
+                </a:lnTo>
+                <a:lnTo>
+                  <a:pt x="2499666" y="1309181"/>
+                </a:lnTo>
+                <a:lnTo>
+                  <a:pt x="2529074" y="1297716"/>
+                </a:lnTo>
+                <a:lnTo>
+                  <a:pt x="2558482" y="1286249"/>
+                </a:lnTo>
+                <a:lnTo>
+                  <a:pt x="2587889" y="1274781"/>
+                </a:lnTo>
+                <a:lnTo>
+                  <a:pt x="2617297" y="1263311"/>
+                </a:lnTo>
+                <a:lnTo>
+                  <a:pt x="2646705" y="1251841"/>
+                </a:lnTo>
+                <a:lnTo>
+                  <a:pt x="2676113" y="1240370"/>
+                </a:lnTo>
+                <a:lnTo>
+                  <a:pt x="2705521" y="1228898"/>
+                </a:lnTo>
+                <a:lnTo>
+                  <a:pt x="2734929" y="1217425"/>
+                </a:lnTo>
+                <a:lnTo>
+                  <a:pt x="2764336" y="1205951"/>
+                </a:lnTo>
+                <a:lnTo>
+                  <a:pt x="2793744" y="1194477"/>
+                </a:lnTo>
+                <a:lnTo>
+                  <a:pt x="2823152" y="1183002"/>
+                </a:lnTo>
+                <a:lnTo>
+                  <a:pt x="2852560" y="1171526"/>
+                </a:lnTo>
+                <a:lnTo>
+                  <a:pt x="2881968" y="1160049"/>
+                </a:lnTo>
+                <a:lnTo>
+                  <a:pt x="2911376" y="1148572"/>
+                </a:lnTo>
+                <a:lnTo>
+                  <a:pt x="2940783" y="1137094"/>
+                </a:lnTo>
+                <a:lnTo>
+                  <a:pt x="2970191" y="1125616"/>
+                </a:lnTo>
+                <a:lnTo>
+                  <a:pt x="2999599" y="1114137"/>
+                </a:lnTo>
+                <a:lnTo>
+                  <a:pt x="3029007" y="1102658"/>
+                </a:lnTo>
+                <a:lnTo>
+                  <a:pt x="3058415" y="1091178"/>
+                </a:lnTo>
+                <a:lnTo>
+                  <a:pt x="3087823" y="1079698"/>
+                </a:lnTo>
+                <a:lnTo>
+                  <a:pt x="3117230" y="1068217"/>
+                </a:lnTo>
+                <a:lnTo>
+                  <a:pt x="3146638" y="1056736"/>
+                </a:lnTo>
+                <a:lnTo>
+                  <a:pt x="3176046" y="1045255"/>
+                </a:lnTo>
+                <a:lnTo>
+                  <a:pt x="3205454" y="1033773"/>
+                </a:lnTo>
+                <a:lnTo>
+                  <a:pt x="3234862" y="1022291"/>
+                </a:lnTo>
+                <a:lnTo>
+                  <a:pt x="3264270" y="1010809"/>
+                </a:lnTo>
+                <a:lnTo>
+                  <a:pt x="3293677" y="999326"/>
+                </a:lnTo>
+                <a:lnTo>
+                  <a:pt x="3323085" y="987843"/>
+                </a:lnTo>
+                <a:lnTo>
+                  <a:pt x="3352493" y="976360"/>
+                </a:lnTo>
+                <a:lnTo>
+                  <a:pt x="3381901" y="964877"/>
+                </a:lnTo>
+                <a:lnTo>
+                  <a:pt x="3411309" y="953393"/>
+                </a:lnTo>
+                <a:lnTo>
+                  <a:pt x="3440717" y="941910"/>
+                </a:lnTo>
+                <a:lnTo>
+                  <a:pt x="3470125" y="930426"/>
+                </a:lnTo>
+                <a:lnTo>
+                  <a:pt x="3499532" y="918941"/>
+                </a:lnTo>
+                <a:lnTo>
+                  <a:pt x="3528940" y="907457"/>
+                </a:lnTo>
+                <a:lnTo>
+                  <a:pt x="3558348" y="895972"/>
+                </a:lnTo>
+                <a:lnTo>
+                  <a:pt x="3587756" y="884488"/>
+                </a:lnTo>
+                <a:lnTo>
+                  <a:pt x="3617164" y="873003"/>
+                </a:lnTo>
+                <a:lnTo>
+                  <a:pt x="3646572" y="861518"/>
+                </a:lnTo>
+                <a:lnTo>
+                  <a:pt x="3675979" y="850033"/>
+                </a:lnTo>
+                <a:lnTo>
+                  <a:pt x="3705387" y="838547"/>
+                </a:lnTo>
+                <a:lnTo>
+                  <a:pt x="3734795" y="827062"/>
+                </a:lnTo>
+                <a:lnTo>
+                  <a:pt x="3764203" y="815576"/>
+                </a:lnTo>
+                <a:lnTo>
+                  <a:pt x="3793611" y="804091"/>
+                </a:lnTo>
+                <a:lnTo>
+                  <a:pt x="3823019" y="792605"/>
+                </a:lnTo>
+                <a:lnTo>
+                  <a:pt x="3852426" y="781119"/>
+                </a:lnTo>
+                <a:lnTo>
+                  <a:pt x="3881834" y="769633"/>
+                </a:lnTo>
+                <a:lnTo>
+                  <a:pt x="3911242" y="758147"/>
+                </a:lnTo>
+                <a:lnTo>
+                  <a:pt x="3940650" y="746661"/>
+                </a:lnTo>
+                <a:lnTo>
+                  <a:pt x="3970058" y="735175"/>
+                </a:lnTo>
+                <a:lnTo>
+                  <a:pt x="3999466" y="723689"/>
+                </a:lnTo>
+                <a:lnTo>
+                  <a:pt x="4028873" y="712202"/>
+                </a:lnTo>
+                <a:lnTo>
+                  <a:pt x="4058281" y="700716"/>
+                </a:lnTo>
+                <a:lnTo>
+                  <a:pt x="4087689" y="689230"/>
+                </a:lnTo>
+                <a:lnTo>
+                  <a:pt x="4117097" y="677743"/>
+                </a:lnTo>
+                <a:lnTo>
+                  <a:pt x="4146505" y="666257"/>
+                </a:lnTo>
+                <a:lnTo>
+                  <a:pt x="4175913" y="654770"/>
+                </a:lnTo>
+                <a:lnTo>
+                  <a:pt x="4205321" y="643283"/>
+                </a:lnTo>
+                <a:lnTo>
+                  <a:pt x="4234728" y="631797"/>
+                </a:lnTo>
+                <a:lnTo>
+                  <a:pt x="4264136" y="620310"/>
+                </a:lnTo>
+                <a:lnTo>
+                  <a:pt x="4293544" y="608823"/>
+                </a:lnTo>
+                <a:lnTo>
+                  <a:pt x="4322952" y="597337"/>
+                </a:lnTo>
+                <a:lnTo>
+                  <a:pt x="4352360" y="585850"/>
+                </a:lnTo>
+                <a:lnTo>
+                  <a:pt x="4381768" y="574363"/>
+                </a:lnTo>
+                <a:lnTo>
+                  <a:pt x="4411175" y="562876"/>
+                </a:lnTo>
+                <a:lnTo>
+                  <a:pt x="4440583" y="551389"/>
+                </a:lnTo>
+                <a:lnTo>
+                  <a:pt x="4469991" y="539902"/>
+                </a:lnTo>
+                <a:lnTo>
+                  <a:pt x="4499399" y="528415"/>
+                </a:lnTo>
+                <a:lnTo>
+                  <a:pt x="4528807" y="516928"/>
+                </a:lnTo>
+                <a:lnTo>
+                  <a:pt x="4558215" y="505441"/>
+                </a:lnTo>
+                <a:lnTo>
+                  <a:pt x="4587622" y="493954"/>
+                </a:lnTo>
+                <a:lnTo>
+                  <a:pt x="4617030" y="482467"/>
+                </a:lnTo>
+                <a:lnTo>
+                  <a:pt x="4646438" y="470980"/>
+                </a:lnTo>
+                <a:lnTo>
+                  <a:pt x="4675846" y="459493"/>
+                </a:lnTo>
+                <a:lnTo>
+                  <a:pt x="4705254" y="448005"/>
+                </a:lnTo>
+                <a:lnTo>
+                  <a:pt x="4734662" y="436518"/>
+                </a:lnTo>
+                <a:lnTo>
+                  <a:pt x="4764069" y="425031"/>
+                </a:lnTo>
+                <a:lnTo>
+                  <a:pt x="4793477" y="413544"/>
+                </a:lnTo>
+                <a:lnTo>
+                  <a:pt x="4822885" y="402057"/>
+                </a:lnTo>
+                <a:lnTo>
+                  <a:pt x="4852293" y="390570"/>
+                </a:lnTo>
+                <a:lnTo>
+                  <a:pt x="4881701" y="379082"/>
+                </a:lnTo>
+                <a:lnTo>
+                  <a:pt x="4911109" y="367595"/>
+                </a:lnTo>
+                <a:lnTo>
+                  <a:pt x="4940516" y="356108"/>
+                </a:lnTo>
+                <a:lnTo>
+                  <a:pt x="4969924" y="344621"/>
+                </a:lnTo>
+                <a:lnTo>
+                  <a:pt x="4999332" y="333133"/>
+                </a:lnTo>
+                <a:lnTo>
+                  <a:pt x="5028740" y="321646"/>
+                </a:lnTo>
+                <a:lnTo>
+                  <a:pt x="5058148" y="310159"/>
+                </a:lnTo>
+                <a:lnTo>
+                  <a:pt x="5087556" y="298671"/>
+                </a:lnTo>
+                <a:lnTo>
+                  <a:pt x="5116964" y="287184"/>
+                </a:lnTo>
+                <a:lnTo>
+                  <a:pt x="5146371" y="275697"/>
+                </a:lnTo>
+                <a:lnTo>
+                  <a:pt x="5175779" y="264210"/>
+                </a:lnTo>
+                <a:lnTo>
+                  <a:pt x="5205187" y="252722"/>
+                </a:lnTo>
+                <a:lnTo>
+                  <a:pt x="5234595" y="241235"/>
+                </a:lnTo>
+                <a:lnTo>
+                  <a:pt x="5264003" y="229748"/>
+                </a:lnTo>
+                <a:lnTo>
+                  <a:pt x="5293411" y="218260"/>
+                </a:lnTo>
+                <a:lnTo>
+                  <a:pt x="5322818" y="206773"/>
+                </a:lnTo>
+                <a:lnTo>
+                  <a:pt x="5352226" y="195286"/>
+                </a:lnTo>
+                <a:lnTo>
+                  <a:pt x="5381634" y="183798"/>
+                </a:lnTo>
+                <a:lnTo>
+                  <a:pt x="5411042" y="172311"/>
+                </a:lnTo>
+                <a:lnTo>
+                  <a:pt x="5440450" y="160823"/>
+                </a:lnTo>
+                <a:lnTo>
+                  <a:pt x="5469858" y="149336"/>
+                </a:lnTo>
+                <a:lnTo>
+                  <a:pt x="5499265" y="137849"/>
+                </a:lnTo>
+                <a:lnTo>
+                  <a:pt x="5528673" y="126361"/>
+                </a:lnTo>
+                <a:lnTo>
+                  <a:pt x="5558081" y="114874"/>
+                </a:lnTo>
+                <a:lnTo>
+                  <a:pt x="5587489" y="103387"/>
+                </a:lnTo>
+                <a:lnTo>
+                  <a:pt x="5616897" y="91899"/>
+                </a:lnTo>
+                <a:lnTo>
+                  <a:pt x="5646305" y="80412"/>
+                </a:lnTo>
+                <a:lnTo>
+                  <a:pt x="5675712" y="68924"/>
+                </a:lnTo>
+                <a:lnTo>
+                  <a:pt x="5705120" y="57437"/>
+                </a:lnTo>
+                <a:lnTo>
+                  <a:pt x="5734528" y="45950"/>
+                </a:lnTo>
+                <a:lnTo>
+                  <a:pt x="5763936" y="34462"/>
+                </a:lnTo>
+                <a:lnTo>
+                  <a:pt x="5793344" y="22975"/>
+                </a:lnTo>
+                <a:lnTo>
+                  <a:pt x="5822752" y="11487"/>
+                </a:lnTo>
+                <a:lnTo>
+                  <a:pt x="5852160" y="0"/>
+                </a:lnTo>
+              </a:path>
+            </a:pathLst>
+          </a:custGeom>
+          <a:noFill/>
+          <a:ln w="43180">
+            <a:solidFill>
+              <a:srgbClr val="8EDBD4"/>
+            </a:solidFill>
+          </a:ln>
+          <a:effectLst/>
+        </p:spPr>
+        <p:txBody>
+          <a:bodyPr rtlCol="0" anchor="ctr"/>
+          <a:lstStyle/>
+          <a:p>
+            <a:pPr algn="ctr"/>
+          </a:p>
+        </p:txBody>
+      </p:sp>
+      <p:cxnSp>
+        <p:nvCxnSpPr>
+          <p:cNvPr id="39" name="A-E19 line 37" descr="sci-ppt:o037"/>
+          <p:cNvCxnSpPr/>
+          <p:nvPr/>
+        </p:nvCxnSpPr>
+        <p:spPr>
+          <a:xfrm>
+            <a:off x="914400" y="4434369"/>
+            <a:ext cx="5852160" cy="0"/>
+          </a:xfrm>
+          <a:prstGeom prst="line">
+            <a:avLst/>
+          </a:prstGeom>
+          <a:ln w="16510">
+            <a:solidFill>
+              <a:srgbClr val="F28BA0"/>
+            </a:solidFill>
+            <a:prstDash val="dash"/>
+          </a:ln>
+          <a:effectLst/>
+        </p:spPr>
+      </p:cxnSp>
+      <p:sp>
+        <p:nvSpPr>
+          <p:cNvPr id="40" name="A-E19 text 38" descr="sci-ppt:o038"/>
+          <p:cNvSpPr txBox="1"/>
+          <p:nvPr/>
+        </p:nvSpPr>
+        <p:spPr>
+          <a:xfrm>
+            <a:off x="1545989" y="4156640"/>
+            <a:ext cx="2377440" cy="223900"/>
           </a:xfrm>
           <a:prstGeom prst="rect">
+            <a:avLst/>
+          </a:prstGeom>
+          <a:noFill/>
+          <a:effectLst/>
+        </p:spPr>
+        <p:txBody>
+          <a:bodyPr wrap="none" lIns="18288" rIns="18288" tIns="18288" bIns="18288" anchor="t">
+            <a:spAutoFit/>
+          </a:bodyPr>
+          <a:lstStyle/>
+          <a:p>
+            <a:pPr algn="l">
+              <a:spcAft>
+                <a:spcPts val="0"/>
+              </a:spcAft>
+            </a:pPr>
+            <a:r>
+              <a:rPr sz="1150" b="0" i="0">
+                <a:solidFill>
+                  <a:srgbClr val="F28BA0"/>
+                </a:solidFill>
+                <a:latin typeface="Arial"/>
+              </a:rPr>
+              <a:t>cₛ = 4.47 m/s (shear)</a:t>
+            </a:r>
+          </a:p>
+        </p:txBody>
+      </p:sp>
+      <p:sp>
+        <p:nvSpPr>
+          <p:cNvPr id="41" name="A-E19 ellipse 39" descr="sci-ppt:o039"/>
+          <p:cNvSpPr/>
+          <p:nvPr/>
+        </p:nvSpPr>
+        <p:spPr>
+          <a:xfrm>
+            <a:off x="5923758" y="2056289"/>
+            <a:ext cx="146304" cy="146304"/>
+          </a:xfrm>
+          <a:prstGeom prst="ellipse">
+            <a:avLst/>
+          </a:prstGeom>
+          <a:solidFill>
+            <a:srgbClr val="F2B880"/>
+          </a:solidFill>
+          <a:ln w="12700">
+            <a:solidFill>
+              <a:srgbClr val="F2B880"/>
+            </a:solidFill>
+          </a:ln>
+          <a:effectLst/>
+        </p:spPr>
+        <p:txBody>
+          <a:bodyPr rtlCol="0" anchor="ctr"/>
+          <a:lstStyle/>
+          <a:p>
+            <a:pPr algn="ctr"/>
+          </a:p>
+        </p:txBody>
+      </p:sp>
+      <p:sp>
+        <p:nvSpPr>
+          <p:cNvPr id="42" name="A-E19 text 40" descr="sci-ppt:o040"/>
+          <p:cNvSpPr txBox="1"/>
+          <p:nvPr/>
+        </p:nvSpPr>
+        <p:spPr>
+          <a:xfrm>
+            <a:off x="2613630" y="2220881"/>
+            <a:ext cx="3291840" cy="223900"/>
+          </a:xfrm>
+          <a:prstGeom prst="rect">
+            <a:avLst/>
+          </a:prstGeom>
+          <a:noFill/>
+          <a:effectLst/>
+        </p:spPr>
+        <p:txBody>
+          <a:bodyPr wrap="none" lIns="18288" rIns="18288" tIns="18288" bIns="18288" anchor="t">
+            <a:spAutoFit/>
+          </a:bodyPr>
+          <a:lstStyle/>
+          <a:p>
+            <a:pPr algn="l">
+              <a:spcAft>
+                <a:spcPts val="0"/>
+              </a:spcAft>
+            </a:pPr>
+            <a:r>
+              <a:rPr sz="1150" b="0" i="0">
+                <a:solidFill>
+                  <a:srgbClr val="F2B880"/>
+                </a:solidFill>
+                <a:latin typeface="Arial"/>
+              </a:rPr>
+              <a:t>K = 2.2 GPa (assumed): c_L = 1483 m/s</a:t>
+            </a:r>
+          </a:p>
+        </p:txBody>
+      </p:sp>
+      <p:sp>
+        <p:nvSpPr>
+          <p:cNvPr id="43" name="A-E19 round_rect 41" descr="sci-ppt:o041"/>
+          <p:cNvSpPr/>
+          <p:nvPr/>
+        </p:nvSpPr>
+        <p:spPr>
+          <a:xfrm>
+            <a:off x="7040880" y="1371600"/>
+            <a:ext cx="4800600" cy="3657600"/>
+          </a:xfrm>
+          <a:prstGeom prst="roundRect">
             <a:avLst/>
           </a:prstGeom>
           <a:solidFill>
             <a:srgbClr val="213E4B"/>
           </a:solidFill>
-          <a:ln w="17780">
+          <a:ln w="20320">
             <a:solidFill>
-              <a:srgbClr val="B4C7D2"/>
+              <a:srgbClr val="8EDBD4"/>
             </a:solidFill>
           </a:ln>
           <a:effectLst/>
@@ -3210,14 +4929,14 @@
       </p:sp>
       <p:sp>
         <p:nvSpPr>
-          <p:cNvPr id="5" name="text 3" descr="sci-ppt:obj-003"/>
+          <p:cNvPr id="44" name="A-E19 text 42" descr="sci-ppt:o042"/>
           <p:cNvSpPr txBox="1"/>
           <p:nvPr/>
         </p:nvSpPr>
         <p:spPr>
           <a:xfrm>
-            <a:off x="1179576" y="1106424"/>
-            <a:ext cx="6492240" cy="310896"/>
+            <a:off x="7150608" y="1426464"/>
+            <a:ext cx="4581144" cy="254889"/>
           </a:xfrm>
           <a:prstGeom prst="rect">
             <a:avLst/>
@@ -3226,7 +4945,7 @@
           <a:effectLst/>
         </p:spPr>
         <p:txBody>
-          <a:bodyPr wrap="none" lIns="0" rIns="0" tIns="0" bIns="0" anchor="ctr">
+          <a:bodyPr wrap="none" lIns="18288" rIns="18288" tIns="18288" bIns="18288" anchor="t">
             <a:spAutoFit/>
           </a:bodyPr>
           <a:lstStyle/>
@@ -3237,59 +4956,67 @@
               </a:spcAft>
             </a:pPr>
             <a:r>
-              <a:rPr sz="1296" b="0" i="0">
+              <a:rPr sz="1350" b="1" i="0">
+                <a:solidFill>
+                  <a:srgbClr val="8EDBD4"/>
+                </a:solidFill>
+                <a:latin typeface="Arial"/>
+              </a:rPr>
+              <a:t>Compressional crossing</a:t>
+            </a:r>
+          </a:p>
+        </p:txBody>
+      </p:sp>
+      <p:sp>
+        <p:nvSpPr>
+          <p:cNvPr id="45" name="A-E19 text 43" descr="sci-ppt:o043"/>
+          <p:cNvSpPr txBox="1"/>
+          <p:nvPr/>
+        </p:nvSpPr>
+        <p:spPr>
+          <a:xfrm>
+            <a:off x="7178040" y="1828800"/>
+            <a:ext cx="4572000" cy="247142"/>
+          </a:xfrm>
+          <a:prstGeom prst="rect">
+            <a:avLst/>
+          </a:prstGeom>
+          <a:noFill/>
+          <a:effectLst/>
+        </p:spPr>
+        <p:txBody>
+          <a:bodyPr wrap="none" lIns="18288" rIns="18288" tIns="18288" bIns="18288" anchor="t">
+            <a:spAutoFit/>
+          </a:bodyPr>
+          <a:lstStyle/>
+          <a:p>
+            <a:pPr algn="l">
+              <a:spcAft>
+                <a:spcPts val="0"/>
+              </a:spcAft>
+            </a:pPr>
+            <a:r>
+              <a:rPr sz="1300" b="1" i="0">
                 <a:solidFill>
                   <a:srgbClr val="E7F0F3"/>
                 </a:solidFill>
                 <a:latin typeface="Arial"/>
               </a:rPr>
-              <a:t>cL: longitudinal wave speed</a:t>
-            </a:r>
-          </a:p>
-        </p:txBody>
-      </p:sp>
-      <p:sp>
-        <p:nvSpPr>
-          <p:cNvPr id="6" name="rect 4" descr="sci-ppt:obj-004"/>
-          <p:cNvSpPr/>
-          <p:nvPr/>
-        </p:nvSpPr>
-        <p:spPr>
-          <a:xfrm>
-            <a:off x="996696" y="1645920"/>
-            <a:ext cx="6766560" cy="347472"/>
-          </a:xfrm>
-          <a:prstGeom prst="rect">
-            <a:avLst/>
-          </a:prstGeom>
-          <a:solidFill>
-            <a:srgbClr val="213E4B"/>
-          </a:solidFill>
-          <a:ln w="17780">
-            <a:solidFill>
-              <a:srgbClr val="B4C7D2"/>
-            </a:solidFill>
-          </a:ln>
-          <a:effectLst/>
-        </p:spPr>
-        <p:txBody>
-          <a:bodyPr rtlCol="0" anchor="ctr"/>
-          <a:lstStyle/>
-          <a:p>
-            <a:pPr algn="ctr"/>
-          </a:p>
-        </p:txBody>
-      </p:sp>
-      <p:sp>
-        <p:nvSpPr>
-          <p:cNvPr id="7" name="text 5" descr="sci-ppt:obj-005"/>
+              <a:t>c_L ≃ √[(K_bulk + 4G_g/3)/ρ_g]</a:t>
+            </a:r>
+          </a:p>
+        </p:txBody>
+      </p:sp>
+      <p:sp>
+        <p:nvSpPr>
+          <p:cNvPr id="46" name="A-E19 text 44" descr="sci-ppt:o044"/>
           <p:cNvSpPr txBox="1"/>
           <p:nvPr/>
         </p:nvSpPr>
         <p:spPr>
           <a:xfrm>
-            <a:off x="1179576" y="1682496"/>
-            <a:ext cx="6492240" cy="310896"/>
+            <a:off x="7178040" y="2331720"/>
+            <a:ext cx="4572000" cy="239395"/>
           </a:xfrm>
           <a:prstGeom prst="rect">
             <a:avLst/>
@@ -3298,7 +5025,7 @@
           <a:effectLst/>
         </p:spPr>
         <p:txBody>
-          <a:bodyPr wrap="none" lIns="0" rIns="0" tIns="0" bIns="0" anchor="ctr">
+          <a:bodyPr wrap="none" lIns="18288" rIns="18288" tIns="18288" bIns="18288" anchor="t">
             <a:spAutoFit/>
           </a:bodyPr>
           <a:lstStyle/>
@@ -3309,59 +5036,163 @@
               </a:spcAft>
             </a:pPr>
             <a:r>
-              <a:rPr sz="1296" b="0" i="0">
+              <a:rPr sz="1250" b="1" i="0">
+                <a:solidFill>
+                  <a:srgbClr val="F2B880"/>
+                </a:solidFill>
+                <a:latin typeface="Arial"/>
+              </a:rPr>
+              <a:t>t_L = L_g / c_L,    M_w = |Ṙ| / c_L</a:t>
+            </a:r>
+          </a:p>
+        </p:txBody>
+      </p:sp>
+      <p:sp>
+        <p:nvSpPr>
+          <p:cNvPr id="47" name="A-E19 text 45" descr="sci-ppt:o045"/>
+          <p:cNvSpPr txBox="1"/>
+          <p:nvPr/>
+        </p:nvSpPr>
+        <p:spPr>
+          <a:xfrm>
+            <a:off x="7178040" y="2926080"/>
+            <a:ext cx="4572000" cy="231648"/>
+          </a:xfrm>
+          <a:prstGeom prst="rect">
+            <a:avLst/>
+          </a:prstGeom>
+          <a:noFill/>
+          <a:effectLst/>
+        </p:spPr>
+        <p:txBody>
+          <a:bodyPr wrap="none" lIns="18288" rIns="18288" tIns="18288" bIns="18288" anchor="t">
+            <a:spAutoFit/>
+          </a:bodyPr>
+          <a:lstStyle/>
+          <a:p>
+            <a:pPr algn="l">
+              <a:spcAft>
+                <a:spcPts val="0"/>
+              </a:spcAft>
+            </a:pPr>
+            <a:r>
+              <a:rPr sz="1200" b="1" i="0">
+                <a:solidFill>
+                  <a:srgbClr val="F2B880"/>
+                </a:solidFill>
+                <a:latin typeface="Arial"/>
+              </a:rPr>
+              <a:t>t_L = 20.2 ns,   M_w = 0.0067  (|Ṙ| = 10 m/s)</a:t>
+            </a:r>
+          </a:p>
+        </p:txBody>
+      </p:sp>
+      <p:sp>
+        <p:nvSpPr>
+          <p:cNvPr id="48" name="A-E19 text 46" descr="sci-ppt:o046"/>
+          <p:cNvSpPr txBox="1"/>
+          <p:nvPr/>
+        </p:nvSpPr>
+        <p:spPr>
+          <a:xfrm>
+            <a:off x="7178040" y="3566160"/>
+            <a:ext cx="4572000" cy="402081"/>
+          </a:xfrm>
+          <a:prstGeom prst="rect">
+            <a:avLst/>
+          </a:prstGeom>
+          <a:noFill/>
+          <a:effectLst/>
+        </p:spPr>
+        <p:txBody>
+          <a:bodyPr wrap="none" lIns="18288" rIns="18288" tIns="18288" bIns="18288" anchor="t">
+            <a:spAutoFit/>
+          </a:bodyPr>
+          <a:lstStyle/>
+          <a:p>
+            <a:pPr algn="l">
+              <a:spcAft>
+                <a:spcPts val="0"/>
+              </a:spcAft>
+            </a:pPr>
+            <a:r>
+              <a:rPr sz="1150" b="0" i="0">
+                <a:solidFill>
+                  <a:srgbClr val="B4C7D2"/>
+                </a:solidFill>
+                <a:latin typeface="Arial"/>
+              </a:rPr>
+              <a:t>K_bulk = 2.2 GPa is an assumed water-like value for</a:t>
+            </a:r>
+          </a:p>
+          <a:p>
+            <a:pPr algn="l">
+              <a:spcAft>
+                <a:spcPts val="0"/>
+              </a:spcAft>
+            </a:pPr>
+            <a:r>
+              <a:rPr sz="1150" b="0" i="0">
+                <a:solidFill>
+                  <a:srgbClr val="B4C7D2"/>
+                </a:solidFill>
+                <a:latin typeface="Arial"/>
+              </a:rPr>
+              <a:t>illustration; the real gel must be characterised.</a:t>
+            </a:r>
+          </a:p>
+        </p:txBody>
+      </p:sp>
+      <p:sp>
+        <p:nvSpPr>
+          <p:cNvPr id="49" name="A-E19 text 47" descr="sci-ppt:o047"/>
+          <p:cNvSpPr txBox="1"/>
+          <p:nvPr/>
+        </p:nvSpPr>
+        <p:spPr>
+          <a:xfrm>
+            <a:off x="914400" y="5733288"/>
+            <a:ext cx="10972800" cy="239395"/>
+          </a:xfrm>
+          <a:prstGeom prst="rect">
+            <a:avLst/>
+          </a:prstGeom>
+          <a:noFill/>
+          <a:effectLst/>
+        </p:spPr>
+        <p:txBody>
+          <a:bodyPr wrap="none" lIns="18288" rIns="18288" tIns="18288" bIns="18288" anchor="t">
+            <a:spAutoFit/>
+          </a:bodyPr>
+          <a:lstStyle/>
+          <a:p>
+            <a:pPr algn="l">
+              <a:spcAft>
+                <a:spcPts val="0"/>
+              </a:spcAft>
+            </a:pPr>
+            <a:r>
+              <a:rPr sz="1250" b="0" i="0">
                 <a:solidFill>
                   <a:srgbClr val="E7F0F3"/>
                 </a:solidFill>
                 <a:latin typeface="Arial"/>
               </a:rPr>
-              <a:t>tL = Lg / cL</a:t>
-            </a:r>
-          </a:p>
-        </p:txBody>
-      </p:sp>
-      <p:sp>
-        <p:nvSpPr>
-          <p:cNvPr id="8" name="rect 6" descr="sci-ppt:obj-006"/>
-          <p:cNvSpPr/>
-          <p:nvPr/>
-        </p:nvSpPr>
-        <p:spPr>
-          <a:xfrm>
-            <a:off x="996696" y="2221992"/>
-            <a:ext cx="6766560" cy="347472"/>
-          </a:xfrm>
-          <a:prstGeom prst="rect">
-            <a:avLst/>
-          </a:prstGeom>
-          <a:solidFill>
-            <a:srgbClr val="213E4B"/>
-          </a:solidFill>
-          <a:ln w="17780">
-            <a:solidFill>
-              <a:srgbClr val="B4C7D2"/>
-            </a:solidFill>
-          </a:ln>
-          <a:effectLst/>
-        </p:spPr>
-        <p:txBody>
-          <a:bodyPr rtlCol="0" anchor="ctr"/>
-          <a:lstStyle/>
-          <a:p>
-            <a:pPr algn="ctr"/>
-          </a:p>
-        </p:txBody>
-      </p:sp>
-      <p:sp>
-        <p:nvSpPr>
-          <p:cNvPr id="9" name="text 7" descr="sci-ppt:obj-007"/>
+              <a:t>Shear and longitudinal waves differ by about 330×: a water-rich gel answers compression almost instantly and shear slowly.</a:t>
+            </a:r>
+          </a:p>
+        </p:txBody>
+      </p:sp>
+      <p:sp>
+        <p:nvSpPr>
+          <p:cNvPr id="50" name="A-E19 text 48" descr="sci-ppt:o048"/>
           <p:cNvSpPr txBox="1"/>
           <p:nvPr/>
         </p:nvSpPr>
         <p:spPr>
           <a:xfrm>
-            <a:off x="1179576" y="2258568"/>
-            <a:ext cx="6492240" cy="310896"/>
+            <a:off x="320040" y="6510528"/>
+            <a:ext cx="11521440" cy="200660"/>
           </a:xfrm>
           <a:prstGeom prst="rect">
             <a:avLst/>
@@ -3370,7 +5201,7 @@
           <a:effectLst/>
         </p:spPr>
         <p:txBody>
-          <a:bodyPr wrap="none" lIns="0" rIns="0" tIns="0" bIns="0" anchor="ctr">
+          <a:bodyPr wrap="none" lIns="18288" rIns="18288" tIns="18288" bIns="18288" anchor="t">
             <a:spAutoFit/>
           </a:bodyPr>
           <a:lstStyle/>
@@ -3381,333 +5212,13 @@
               </a:spcAft>
             </a:pPr>
             <a:r>
-              <a:rPr sz="1296" b="0" i="0">
+              <a:rPr sz="1000" b="0" i="0">
                 <a:solidFill>
-                  <a:srgbClr val="E7F0F3"/>
+                  <a:srgbClr val="B4C7D2"/>
                 </a:solidFill>
                 <a:latin typeface="Arial"/>
               </a:rPr>
-              <a:t>Mw = |Ṙ| / cL</a:t>
-            </a:r>
-          </a:p>
-        </p:txBody>
-      </p:sp>
-      <p:sp>
-        <p:nvSpPr>
-          <p:cNvPr id="10" name="text 8" descr="sci-ppt:obj-008"/>
-          <p:cNvSpPr txBox="1"/>
-          <p:nvPr/>
-        </p:nvSpPr>
-        <p:spPr>
-          <a:xfrm>
-            <a:off x="1005840" y="2862072"/>
-            <a:ext cx="7680960" cy="310896"/>
-          </a:xfrm>
-          <a:prstGeom prst="rect">
-            <a:avLst/>
-          </a:prstGeom>
-          <a:noFill/>
-          <a:effectLst/>
-        </p:spPr>
-        <p:txBody>
-          <a:bodyPr wrap="none" lIns="0" rIns="0" tIns="0" bIns="0" anchor="ctr">
-            <a:spAutoFit/>
-          </a:bodyPr>
-          <a:lstStyle/>
-          <a:p>
-            <a:pPr algn="l">
-              <a:spcAft>
-                <a:spcPts val="0"/>
-              </a:spcAft>
-            </a:pPr>
-            <a:r>
-              <a:rPr sz="1152" b="0" i="0">
-                <a:solidFill>
-                  <a:srgbClr val="E7F0F3"/>
-                </a:solidFill>
-                <a:latin typeface="Arial"/>
-              </a:rPr>
-              <a:t>Equal boxes list definitions; lengths do not encode time</a:t>
-            </a:r>
-          </a:p>
-        </p:txBody>
-      </p:sp>
-      <p:sp>
-        <p:nvSpPr>
-          <p:cNvPr id="11" name="text 9" descr="sci-ppt:obj-009"/>
-          <p:cNvSpPr txBox="1"/>
-          <p:nvPr/>
-        </p:nvSpPr>
-        <p:spPr>
-          <a:xfrm>
-            <a:off x="256032" y="3465576"/>
-            <a:ext cx="7315200" cy="310896"/>
-          </a:xfrm>
-          <a:prstGeom prst="rect">
-            <a:avLst/>
-          </a:prstGeom>
-          <a:noFill/>
-          <a:effectLst/>
-        </p:spPr>
-        <p:txBody>
-          <a:bodyPr wrap="none" lIns="0" rIns="0" tIns="0" bIns="0" anchor="ctr">
-            <a:spAutoFit/>
-          </a:bodyPr>
-          <a:lstStyle/>
-          <a:p>
-            <a:pPr algn="l">
-              <a:spcAft>
-                <a:spcPts val="0"/>
-              </a:spcAft>
-            </a:pPr>
-            <a:r>
-              <a:rPr sz="1296" b="0" i="0">
-                <a:solidFill>
-                  <a:srgbClr val="8EDBD4"/>
-                </a:solidFill>
-                <a:latin typeface="Arial"/>
-              </a:rPr>
-              <a:t>Variables and physical limits</a:t>
-            </a:r>
-          </a:p>
-        </p:txBody>
-      </p:sp>
-      <p:sp>
-        <p:nvSpPr>
-          <p:cNvPr id="12" name="text 10" descr="sci-ppt:obj-010"/>
-          <p:cNvSpPr txBox="1"/>
-          <p:nvPr/>
-        </p:nvSpPr>
-        <p:spPr>
-          <a:xfrm>
-            <a:off x="365760" y="3813048"/>
-            <a:ext cx="8412480" cy="310896"/>
-          </a:xfrm>
-          <a:prstGeom prst="rect">
-            <a:avLst/>
-          </a:prstGeom>
-          <a:noFill/>
-          <a:effectLst/>
-        </p:spPr>
-        <p:txBody>
-          <a:bodyPr wrap="none" lIns="0" rIns="0" tIns="0" bIns="0" anchor="ctr">
-            <a:spAutoFit/>
-          </a:bodyPr>
-          <a:lstStyle/>
-          <a:p>
-            <a:pPr algn="l">
-              <a:spcAft>
-                <a:spcPts val="0"/>
-              </a:spcAft>
-            </a:pPr>
-            <a:r>
-              <a:rPr sz="1152" b="0" i="0">
-                <a:solidFill>
-                  <a:srgbClr val="E7F0F3"/>
-                </a:solidFill>
-                <a:latin typeface="Arial"/>
-              </a:rPr>
-              <a:t>• cL: bulk and shear response</a:t>
-            </a:r>
-          </a:p>
-        </p:txBody>
-      </p:sp>
-      <p:sp>
-        <p:nvSpPr>
-          <p:cNvPr id="13" name="text 11" descr="sci-ppt:obj-011"/>
-          <p:cNvSpPr txBox="1"/>
-          <p:nvPr/>
-        </p:nvSpPr>
-        <p:spPr>
-          <a:xfrm>
-            <a:off x="365760" y="4023360"/>
-            <a:ext cx="8412480" cy="310896"/>
-          </a:xfrm>
-          <a:prstGeom prst="rect">
-            <a:avLst/>
-          </a:prstGeom>
-          <a:noFill/>
-          <a:effectLst/>
-        </p:spPr>
-        <p:txBody>
-          <a:bodyPr wrap="none" lIns="0" rIns="0" tIns="0" bIns="0" anchor="ctr">
-            <a:spAutoFit/>
-          </a:bodyPr>
-          <a:lstStyle/>
-          <a:p>
-            <a:pPr algn="l">
-              <a:spcAft>
-                <a:spcPts val="0"/>
-              </a:spcAft>
-            </a:pPr>
-            <a:r>
-              <a:rPr sz="1152" b="0" i="0">
-                <a:solidFill>
-                  <a:srgbClr val="E7F0F3"/>
-                </a:solidFill>
-                <a:latin typeface="Arial"/>
-              </a:rPr>
-              <a:t>• Kgᵇᵘˡᵏ, Gg, ρg</a:t>
-            </a:r>
-          </a:p>
-        </p:txBody>
-      </p:sp>
-      <p:sp>
-        <p:nvSpPr>
-          <p:cNvPr id="14" name="text 12" descr="sci-ppt:obj-012"/>
-          <p:cNvSpPr txBox="1"/>
-          <p:nvPr/>
-        </p:nvSpPr>
-        <p:spPr>
-          <a:xfrm>
-            <a:off x="365760" y="4233672"/>
-            <a:ext cx="8412480" cy="310896"/>
-          </a:xfrm>
-          <a:prstGeom prst="rect">
-            <a:avLst/>
-          </a:prstGeom>
-          <a:noFill/>
-          <a:effectLst/>
-        </p:spPr>
-        <p:txBody>
-          <a:bodyPr wrap="none" lIns="0" rIns="0" tIns="0" bIns="0" anchor="ctr">
-            <a:spAutoFit/>
-          </a:bodyPr>
-          <a:lstStyle/>
-          <a:p>
-            <a:pPr algn="l">
-              <a:spcAft>
-                <a:spcPts val="0"/>
-              </a:spcAft>
-            </a:pPr>
-            <a:r>
-              <a:rPr sz="1152" b="0" i="0">
-                <a:solidFill>
-                  <a:srgbClr val="E7F0F3"/>
-                </a:solidFill>
-                <a:latin typeface="Arial"/>
-              </a:rPr>
-              <a:t>• Lg/cL = tL</a:t>
-            </a:r>
-          </a:p>
-        </p:txBody>
-      </p:sp>
-      <p:sp>
-        <p:nvSpPr>
-          <p:cNvPr id="15" name="text 13" descr="sci-ppt:obj-013"/>
-          <p:cNvSpPr txBox="1"/>
-          <p:nvPr/>
-        </p:nvSpPr>
-        <p:spPr>
-          <a:xfrm>
-            <a:off x="365760" y="4443984"/>
-            <a:ext cx="8412480" cy="310896"/>
-          </a:xfrm>
-          <a:prstGeom prst="rect">
-            <a:avLst/>
-          </a:prstGeom>
-          <a:noFill/>
-          <a:effectLst/>
-        </p:spPr>
-        <p:txBody>
-          <a:bodyPr wrap="none" lIns="0" rIns="0" tIns="0" bIns="0" anchor="ctr">
-            <a:spAutoFit/>
-          </a:bodyPr>
-          <a:lstStyle/>
-          <a:p>
-            <a:pPr algn="l">
-              <a:spcAft>
-                <a:spcPts val="0"/>
-              </a:spcAft>
-            </a:pPr>
-            <a:r>
-              <a:rPr sz="1152" b="0" i="0">
-                <a:solidFill>
-                  <a:srgbClr val="E7F0F3"/>
-                </a:solidFill>
-                <a:latin typeface="Arial"/>
-              </a:rPr>
-              <a:t>• |Ṙ|/cL = Mw</a:t>
-            </a:r>
-          </a:p>
-        </p:txBody>
-      </p:sp>
-      <p:sp>
-        <p:nvSpPr>
-          <p:cNvPr id="16" name="text 14" descr="sci-ppt:obj-014"/>
-          <p:cNvSpPr txBox="1"/>
-          <p:nvPr/>
-        </p:nvSpPr>
-        <p:spPr>
-          <a:xfrm>
-            <a:off x="365760" y="4654296"/>
-            <a:ext cx="8412480" cy="310896"/>
-          </a:xfrm>
-          <a:prstGeom prst="rect">
-            <a:avLst/>
-          </a:prstGeom>
-          <a:noFill/>
-          <a:effectLst/>
-        </p:spPr>
-        <p:txBody>
-          <a:bodyPr wrap="none" lIns="0" rIns="0" tIns="0" bIns="0" anchor="ctr">
-            <a:spAutoFit/>
-          </a:bodyPr>
-          <a:lstStyle/>
-          <a:p>
-            <a:pPr algn="l">
-              <a:spcAft>
-                <a:spcPts val="0"/>
-              </a:spcAft>
-            </a:pPr>
-            <a:r>
-              <a:rPr sz="1152" b="0" i="0">
-                <a:solidFill>
-                  <a:srgbClr val="E7F0F3"/>
-                </a:solidFill>
-                <a:latin typeface="Arial"/>
-              </a:rPr>
-              <a:t>Small shear stiffness does not establish small longitudinal impedance</a:t>
-            </a:r>
-          </a:p>
-        </p:txBody>
-      </p:sp>
-      <p:sp>
-        <p:nvSpPr>
-          <p:cNvPr id="17" name="text 15" descr="sci-ppt:obj-015"/>
-          <p:cNvSpPr txBox="1"/>
-          <p:nvPr/>
-        </p:nvSpPr>
-        <p:spPr>
-          <a:xfrm>
-            <a:off x="365760" y="4864608"/>
-            <a:ext cx="8412480" cy="310896"/>
-          </a:xfrm>
-          <a:prstGeom prst="rect">
-            <a:avLst/>
-          </a:prstGeom>
-          <a:noFill/>
-          <a:effectLst/>
-        </p:spPr>
-        <p:txBody>
-          <a:bodyPr wrap="none" lIns="0" rIns="0" tIns="0" bIns="0" anchor="ctr">
-            <a:spAutoFit/>
-          </a:bodyPr>
-          <a:lstStyle/>
-          <a:p>
-            <a:pPr algn="l">
-              <a:spcAft>
-                <a:spcPts val="0"/>
-              </a:spcAft>
-            </a:pPr>
-            <a:r>
-              <a:rPr sz="1152" b="0" i="0">
-                <a:solidFill>
-                  <a:srgbClr val="E7F0F3"/>
-                </a:solidFill>
-                <a:latin typeface="Arial"/>
-              </a:rPr>
-              <a:t>Do not compute shock load from the incompressible control</a:t>
+              <a:t>Separate compressibility diagnostic of Eq. A-E19 (L_g = 30 µm).</a:t>
             </a:r>
           </a:p>
         </p:txBody>
